--- a/slides.pptx
+++ b/slides.pptx
@@ -5,12 +5,16 @@
     <p:sldMasterId id="2147483648" r:id="rId1"/>
   </p:sldMasterIdLst>
   <p:sldIdLst>
-    <p:sldId id="256" r:id="rId2"/>
-    <p:sldId id="257" r:id="rId3"/>
-    <p:sldId id="258" r:id="rId4"/>
-    <p:sldId id="259" r:id="rId5"/>
-    <p:sldId id="260" r:id="rId6"/>
-    <p:sldId id="261" r:id="rId7"/>
+    <p:sldId id="263" r:id="rId2"/>
+    <p:sldId id="265" r:id="rId3"/>
+    <p:sldId id="264" r:id="rId4"/>
+    <p:sldId id="256" r:id="rId5"/>
+    <p:sldId id="257" r:id="rId6"/>
+    <p:sldId id="258" r:id="rId7"/>
+    <p:sldId id="259" r:id="rId8"/>
+    <p:sldId id="260" r:id="rId9"/>
+    <p:sldId id="261" r:id="rId10"/>
+    <p:sldId id="262" r:id="rId11"/>
   </p:sldIdLst>
   <p:sldSz cx="12192000" cy="6858000"/>
   <p:notesSz cx="6858000" cy="9144000"/>
@@ -109,7 +113,20 @@
       </a:defRPr>
     </a:lvl9pPr>
   </p:defaultTextStyle>
+  <p:extLst>
+    <p:ext uri="{EFAFB233-063F-42B5-8137-9DF3F51BA10A}">
+      <p15:sldGuideLst xmlns:p15="http://schemas.microsoft.com/office/powerpoint/2012/main"/>
+    </p:ext>
+  </p:extLst>
 </p:presentation>
+</file>
+
+<file path=ppt/revisionInfo.xml><?xml version="1.0" encoding="utf-8"?>
+<p1510:revInfo xmlns:a="http://schemas.openxmlformats.org/drawingml/2006/main" xmlns:r="http://schemas.openxmlformats.org/officeDocument/2006/relationships" xmlns:p1510="http://schemas.microsoft.com/office/powerpoint/2015/10/main">
+  <p1510:revLst>
+    <p1510:client id="{90FB8A92-F67E-4639-86BE-B985C2F1D1DF}" v="17" dt="2026-05-30T12:09:45.909"/>
+  </p1510:revLst>
+</p1510:revInfo>
 </file>
 
 <file path=ppt/slideLayouts/slideLayout1.xml><?xml version="1.0" encoding="utf-8"?>
@@ -3347,10 +3364,302 @@
           <a:chExt cx="0" cy="0"/>
         </a:xfrm>
       </p:grpSpPr>
+      <p:sp>
+        <p:nvSpPr>
+          <p:cNvPr id="2" name="Title 1">
+            <a:extLst>
+              <a:ext uri="{FF2B5EF4-FFF2-40B4-BE49-F238E27FC236}">
+                <a16:creationId xmlns:a16="http://schemas.microsoft.com/office/drawing/2014/main" id="{0A995D05-161F-9604-2232-F3F5D7DC2653}"/>
+              </a:ext>
+            </a:extLst>
+          </p:cNvPr>
+          <p:cNvSpPr>
+            <a:spLocks noGrp="1"/>
+          </p:cNvSpPr>
+          <p:nvPr>
+            <p:ph type="title"/>
+          </p:nvPr>
+        </p:nvSpPr>
+        <p:spPr>
+          <a:xfrm>
+            <a:off x="937592" y="1948760"/>
+            <a:ext cx="10515600" cy="1325563"/>
+          </a:xfrm>
+        </p:spPr>
+        <p:txBody>
+          <a:bodyPr>
+            <a:normAutofit/>
+          </a:bodyPr>
+          <a:lstStyle/>
+          <a:p>
+            <a:pPr algn="ctr"/>
+            <a:r>
+              <a:rPr lang="en-GB" sz="3600" b="1" dirty="0">
+                <a:latin typeface="Calibri" panose="020F0502020204030204" pitchFamily="34" charset="0"/>
+                <a:ea typeface="Calibri" panose="020F0502020204030204" pitchFamily="34" charset="0"/>
+                <a:cs typeface="Calibri" panose="020F0502020204030204" pitchFamily="34" charset="0"/>
+              </a:rPr>
+              <a:t>Getting started with Geoscientific Machine Learning </a:t>
+            </a:r>
+          </a:p>
+        </p:txBody>
+      </p:sp>
+      <p:sp>
+        <p:nvSpPr>
+          <p:cNvPr id="4" name="TextBox 3">
+            <a:extLst>
+              <a:ext uri="{FF2B5EF4-FFF2-40B4-BE49-F238E27FC236}">
+                <a16:creationId xmlns:a16="http://schemas.microsoft.com/office/drawing/2014/main" id="{DF9A933E-E124-937D-6BD4-24F4A05D3432}"/>
+              </a:ext>
+            </a:extLst>
+          </p:cNvPr>
+          <p:cNvSpPr txBox="1"/>
+          <p:nvPr/>
+        </p:nvSpPr>
+        <p:spPr>
+          <a:xfrm>
+            <a:off x="3273287" y="3399012"/>
+            <a:ext cx="6804991" cy="369332"/>
+          </a:xfrm>
+          <a:prstGeom prst="rect">
+            <a:avLst/>
+          </a:prstGeom>
+          <a:noFill/>
+        </p:spPr>
+        <p:txBody>
+          <a:bodyPr wrap="square" rtlCol="0">
+            <a:spAutoFit/>
+          </a:bodyPr>
+          <a:lstStyle/>
+          <a:p>
+            <a:r>
+              <a:rPr lang="en-GB" dirty="0"/>
+              <a:t>2026 Workshop on AI in Earth &amp; Planetary Sciences</a:t>
+            </a:r>
+          </a:p>
+        </p:txBody>
+      </p:sp>
     </p:spTree>
     <p:extLst>
       <p:ext uri="{BB962C8B-B14F-4D97-AF65-F5344CB8AC3E}">
-        <p14:creationId xmlns:p14="http://schemas.microsoft.com/office/powerpoint/2010/main" val="516005526"/>
+        <p14:creationId xmlns:p14="http://schemas.microsoft.com/office/powerpoint/2010/main" val="1037443576"/>
+      </p:ext>
+    </p:extLst>
+  </p:cSld>
+  <p:clrMapOvr>
+    <a:masterClrMapping/>
+  </p:clrMapOvr>
+</p:sld>
+</file>
+
+<file path=ppt/slides/slide10.xml><?xml version="1.0" encoding="utf-8"?>
+<p:sld xmlns:a="http://schemas.openxmlformats.org/drawingml/2006/main" xmlns:r="http://schemas.openxmlformats.org/officeDocument/2006/relationships" xmlns:p="http://schemas.openxmlformats.org/presentationml/2006/main">
+  <p:cSld>
+    <p:spTree>
+      <p:nvGrpSpPr>
+        <p:cNvPr id="1" name=""/>
+        <p:cNvGrpSpPr/>
+        <p:nvPr/>
+      </p:nvGrpSpPr>
+      <p:grpSpPr>
+        <a:xfrm>
+          <a:off x="0" y="0"/>
+          <a:ext cx="0" cy="0"/>
+          <a:chOff x="0" y="0"/>
+          <a:chExt cx="0" cy="0"/>
+        </a:xfrm>
+      </p:grpSpPr>
+      <p:pic>
+        <p:nvPicPr>
+          <p:cNvPr id="5" name="Picture 4">
+            <a:extLst>
+              <a:ext uri="{FF2B5EF4-FFF2-40B4-BE49-F238E27FC236}">
+                <a16:creationId xmlns:a16="http://schemas.microsoft.com/office/drawing/2014/main" id="{A4F06886-98DE-15F0-76FA-095C6B6BF7DA}"/>
+              </a:ext>
+            </a:extLst>
+          </p:cNvPr>
+          <p:cNvPicPr>
+            <a:picLocks noChangeAspect="1"/>
+          </p:cNvPicPr>
+          <p:nvPr/>
+        </p:nvPicPr>
+        <p:blipFill>
+          <a:blip r:embed="rId2"/>
+          <a:stretch>
+            <a:fillRect/>
+          </a:stretch>
+        </p:blipFill>
+        <p:spPr>
+          <a:xfrm>
+            <a:off x="-270662" y="2301810"/>
+            <a:ext cx="12192000" cy="4419679"/>
+          </a:xfrm>
+          <a:prstGeom prst="rect">
+            <a:avLst/>
+          </a:prstGeom>
+        </p:spPr>
+      </p:pic>
+      <p:sp>
+        <p:nvSpPr>
+          <p:cNvPr id="6" name="TextBox 5">
+            <a:extLst>
+              <a:ext uri="{FF2B5EF4-FFF2-40B4-BE49-F238E27FC236}">
+                <a16:creationId xmlns:a16="http://schemas.microsoft.com/office/drawing/2014/main" id="{61C3AE45-3838-2086-CE29-742678E48A51}"/>
+              </a:ext>
+            </a:extLst>
+          </p:cNvPr>
+          <p:cNvSpPr txBox="1"/>
+          <p:nvPr/>
+        </p:nvSpPr>
+        <p:spPr>
+          <a:xfrm>
+            <a:off x="823331" y="242886"/>
+            <a:ext cx="10958170" cy="523220"/>
+          </a:xfrm>
+          <a:prstGeom prst="rect">
+            <a:avLst/>
+          </a:prstGeom>
+          <a:noFill/>
+        </p:spPr>
+        <p:txBody>
+          <a:bodyPr wrap="square" rtlCol="0">
+            <a:spAutoFit/>
+          </a:bodyPr>
+          <a:lstStyle/>
+          <a:p>
+            <a:r>
+              <a:rPr lang="en-GB" sz="2800" b="1" noProof="0" dirty="0">
+                <a:latin typeface="Calibri" panose="020F0502020204030204" pitchFamily="34" charset="0"/>
+                <a:ea typeface="Calibri" panose="020F0502020204030204" pitchFamily="34" charset="0"/>
+                <a:cs typeface="Calibri" panose="020F0502020204030204" pitchFamily="34" charset="0"/>
+              </a:rPr>
+              <a:t>(optional) Install Julia language support extension inside </a:t>
+            </a:r>
+            <a:r>
+              <a:rPr lang="en-GB" sz="2800" b="1" noProof="0" dirty="0" err="1">
+                <a:latin typeface="Calibri" panose="020F0502020204030204" pitchFamily="34" charset="0"/>
+                <a:ea typeface="Calibri" panose="020F0502020204030204" pitchFamily="34" charset="0"/>
+                <a:cs typeface="Calibri" panose="020F0502020204030204" pitchFamily="34" charset="0"/>
+              </a:rPr>
+              <a:t>VSCode</a:t>
+            </a:r>
+            <a:endParaRPr lang="en-GB" sz="2800" b="1" noProof="0" dirty="0">
+              <a:latin typeface="Calibri" panose="020F0502020204030204" pitchFamily="34" charset="0"/>
+              <a:ea typeface="Calibri" panose="020F0502020204030204" pitchFamily="34" charset="0"/>
+              <a:cs typeface="Calibri" panose="020F0502020204030204" pitchFamily="34" charset="0"/>
+            </a:endParaRPr>
+          </a:p>
+        </p:txBody>
+      </p:sp>
+      <p:sp>
+        <p:nvSpPr>
+          <p:cNvPr id="7" name="TextBox 6">
+            <a:extLst>
+              <a:ext uri="{FF2B5EF4-FFF2-40B4-BE49-F238E27FC236}">
+                <a16:creationId xmlns:a16="http://schemas.microsoft.com/office/drawing/2014/main" id="{F3E7B910-933A-76FE-059A-81B64EDBEB89}"/>
+              </a:ext>
+            </a:extLst>
+          </p:cNvPr>
+          <p:cNvSpPr txBox="1"/>
+          <p:nvPr/>
+        </p:nvSpPr>
+        <p:spPr>
+          <a:xfrm>
+            <a:off x="7845976" y="1060504"/>
+            <a:ext cx="4172897" cy="923330"/>
+          </a:xfrm>
+          <a:prstGeom prst="rect">
+            <a:avLst/>
+          </a:prstGeom>
+          <a:noFill/>
+        </p:spPr>
+        <p:txBody>
+          <a:bodyPr wrap="square" rtlCol="0">
+            <a:spAutoFit/>
+          </a:bodyPr>
+          <a:lstStyle/>
+          <a:p>
+            <a:r>
+              <a:rPr lang="en-GB" dirty="0"/>
+              <a:t>If you’re using </a:t>
+            </a:r>
+            <a:r>
+              <a:rPr lang="en-GB" b="1" dirty="0"/>
+              <a:t>GTK</a:t>
+            </a:r>
+            <a:r>
+              <a:rPr lang="en-GB" dirty="0"/>
+              <a:t> </a:t>
+            </a:r>
+            <a:r>
+              <a:rPr lang="en-GB" b="1" dirty="0"/>
+              <a:t>WORK</a:t>
+            </a:r>
+            <a:r>
+              <a:rPr lang="en-GB" dirty="0"/>
+              <a:t> Laptop, </a:t>
+            </a:r>
+            <a:br>
+              <a:rPr lang="en-GB" dirty="0"/>
+            </a:br>
+            <a:r>
+              <a:rPr lang="en-GB" dirty="0"/>
+              <a:t>don’t install this for now because in it maybe blocked by IT </a:t>
+            </a:r>
+          </a:p>
+        </p:txBody>
+      </p:sp>
+      <p:pic>
+        <p:nvPicPr>
+          <p:cNvPr id="1026" name="Picture 2" descr="⚠️ Warning Emoji: Meaning &amp; Usage">
+            <a:extLst>
+              <a:ext uri="{FF2B5EF4-FFF2-40B4-BE49-F238E27FC236}">
+                <a16:creationId xmlns:a16="http://schemas.microsoft.com/office/drawing/2014/main" id="{793FA974-79F1-032B-40CD-5667ACF481DC}"/>
+              </a:ext>
+            </a:extLst>
+          </p:cNvPr>
+          <p:cNvPicPr>
+            <a:picLocks noChangeAspect="1" noChangeArrowheads="1"/>
+          </p:cNvPicPr>
+          <p:nvPr/>
+        </p:nvPicPr>
+        <p:blipFill>
+          <a:blip r:embed="rId3">
+            <a:extLst>
+              <a:ext uri="{28A0092B-C50C-407E-A947-70E740481C1C}">
+                <a14:useLocalDpi xmlns:a14="http://schemas.microsoft.com/office/drawing/2010/main" val="0"/>
+              </a:ext>
+            </a:extLst>
+          </a:blip>
+          <a:srcRect/>
+          <a:stretch>
+            <a:fillRect/>
+          </a:stretch>
+        </p:blipFill>
+        <p:spPr bwMode="auto">
+          <a:xfrm>
+            <a:off x="6620257" y="858926"/>
+            <a:ext cx="1148486" cy="1148486"/>
+          </a:xfrm>
+          <a:prstGeom prst="rect">
+            <a:avLst/>
+          </a:prstGeom>
+          <a:noFill/>
+          <a:extLst>
+            <a:ext uri="{909E8E84-426E-40DD-AFC4-6F175D3DCCD1}">
+              <a14:hiddenFill xmlns:a14="http://schemas.microsoft.com/office/drawing/2010/main">
+                <a:solidFill>
+                  <a:srgbClr val="FFFFFF"/>
+                </a:solidFill>
+              </a14:hiddenFill>
+            </a:ext>
+          </a:extLst>
+        </p:spPr>
+      </p:pic>
+    </p:spTree>
+    <p:extLst>
+      <p:ext uri="{BB962C8B-B14F-4D97-AF65-F5344CB8AC3E}">
+        <p14:creationId xmlns:p14="http://schemas.microsoft.com/office/powerpoint/2010/main" val="4237632311"/>
       </p:ext>
     </p:extLst>
   </p:cSld>
@@ -3377,42 +3686,12 @@
           <a:chExt cx="0" cy="0"/>
         </a:xfrm>
       </p:grpSpPr>
-      <p:pic>
-        <p:nvPicPr>
-          <p:cNvPr id="5" name="Picture 4">
-            <a:extLst>
-              <a:ext uri="{FF2B5EF4-FFF2-40B4-BE49-F238E27FC236}">
-                <a16:creationId xmlns:a16="http://schemas.microsoft.com/office/drawing/2014/main" id="{AFD4223C-88E2-EF15-CF02-C7AFC58F8662}"/>
-              </a:ext>
-            </a:extLst>
-          </p:cNvPr>
-          <p:cNvPicPr>
-            <a:picLocks noChangeAspect="1"/>
-          </p:cNvPicPr>
-          <p:nvPr/>
-        </p:nvPicPr>
-        <p:blipFill>
-          <a:blip r:embed="rId2"/>
-          <a:stretch>
-            <a:fillRect/>
-          </a:stretch>
-        </p:blipFill>
-        <p:spPr>
-          <a:xfrm>
-            <a:off x="308271" y="1732204"/>
-            <a:ext cx="11151173" cy="4915153"/>
-          </a:xfrm>
-          <a:prstGeom prst="rect">
-            <a:avLst/>
-          </a:prstGeom>
-        </p:spPr>
-      </p:pic>
-      <p:sp>
-        <p:nvSpPr>
-          <p:cNvPr id="6" name="TextBox 5">
-            <a:extLst>
-              <a:ext uri="{FF2B5EF4-FFF2-40B4-BE49-F238E27FC236}">
-                <a16:creationId xmlns:a16="http://schemas.microsoft.com/office/drawing/2014/main" id="{B281FA3D-D1AC-7557-2DC9-999E30DD5C93}"/>
+      <p:sp>
+        <p:nvSpPr>
+          <p:cNvPr id="4" name="TextBox 3">
+            <a:extLst>
+              <a:ext uri="{FF2B5EF4-FFF2-40B4-BE49-F238E27FC236}">
+                <a16:creationId xmlns:a16="http://schemas.microsoft.com/office/drawing/2014/main" id="{AAEE2C08-B297-DE9B-EA0C-B1C6E3D82D6C}"/>
               </a:ext>
             </a:extLst>
           </p:cNvPr>
@@ -3421,18 +3700,13 @@
         </p:nvSpPr>
         <p:spPr>
           <a:xfrm>
-            <a:off x="4747565" y="2223821"/>
-            <a:ext cx="4206240" cy="369332"/>
+            <a:off x="384419" y="264832"/>
+            <a:ext cx="10958170" cy="523220"/>
           </a:xfrm>
           <a:prstGeom prst="rect">
             <a:avLst/>
           </a:prstGeom>
           <a:noFill/>
-          <a:ln w="12700">
-            <a:solidFill>
-              <a:srgbClr val="00B050"/>
-            </a:solidFill>
-          </a:ln>
         </p:spPr>
         <p:txBody>
           <a:bodyPr wrap="square" rtlCol="0">
@@ -3440,18 +3714,153 @@
           </a:bodyPr>
           <a:lstStyle/>
           <a:p>
-            <a:endParaRPr lang="LID4096" dirty="0">
+            <a:r>
+              <a:rPr lang="en-GB" sz="2800" b="1" dirty="0">
+                <a:latin typeface="Calibri" panose="020F0502020204030204" pitchFamily="34" charset="0"/>
+                <a:ea typeface="Calibri" panose="020F0502020204030204" pitchFamily="34" charset="0"/>
+                <a:cs typeface="Calibri" panose="020F0502020204030204" pitchFamily="34" charset="0"/>
+              </a:rPr>
+              <a:t>Target Audience &amp; learning objectives</a:t>
+            </a:r>
+            <a:endParaRPr lang="en-GB" sz="2800" b="1" noProof="0" dirty="0">
               <a:solidFill>
                 <a:srgbClr val="FF0000"/>
               </a:solidFill>
+              <a:latin typeface="Calibri" panose="020F0502020204030204" pitchFamily="34" charset="0"/>
+              <a:ea typeface="Calibri" panose="020F0502020204030204" pitchFamily="34" charset="0"/>
+              <a:cs typeface="Calibri" panose="020F0502020204030204" pitchFamily="34" charset="0"/>
             </a:endParaRPr>
+          </a:p>
+        </p:txBody>
+      </p:sp>
+      <p:sp>
+        <p:nvSpPr>
+          <p:cNvPr id="5" name="TextBox 4">
+            <a:extLst>
+              <a:ext uri="{FF2B5EF4-FFF2-40B4-BE49-F238E27FC236}">
+                <a16:creationId xmlns:a16="http://schemas.microsoft.com/office/drawing/2014/main" id="{0BCE9E4F-91E5-B8DD-54F5-79369835799F}"/>
+              </a:ext>
+            </a:extLst>
+          </p:cNvPr>
+          <p:cNvSpPr txBox="1"/>
+          <p:nvPr/>
+        </p:nvSpPr>
+        <p:spPr>
+          <a:xfrm>
+            <a:off x="1431235" y="1616765"/>
+            <a:ext cx="9534939" cy="369332"/>
+          </a:xfrm>
+          <a:prstGeom prst="rect">
+            <a:avLst/>
+          </a:prstGeom>
+          <a:noFill/>
+        </p:spPr>
+        <p:txBody>
+          <a:bodyPr wrap="square" rtlCol="0">
+            <a:spAutoFit/>
+          </a:bodyPr>
+          <a:lstStyle/>
+          <a:p>
+            <a:r>
+              <a:rPr lang="en-GB" dirty="0">
+                <a:latin typeface="Calibri" panose="020F0502020204030204" pitchFamily="34" charset="0"/>
+                <a:ea typeface="Calibri" panose="020F0502020204030204" pitchFamily="34" charset="0"/>
+                <a:cs typeface="Calibri" panose="020F0502020204030204" pitchFamily="34" charset="0"/>
+              </a:rPr>
+              <a:t>Primary target audience is someone with no previous machine learning or programming experience</a:t>
+            </a:r>
+          </a:p>
+        </p:txBody>
+      </p:sp>
+      <p:sp>
+        <p:nvSpPr>
+          <p:cNvPr id="6" name="TextBox 5">
+            <a:extLst>
+              <a:ext uri="{FF2B5EF4-FFF2-40B4-BE49-F238E27FC236}">
+                <a16:creationId xmlns:a16="http://schemas.microsoft.com/office/drawing/2014/main" id="{B2A70119-FB86-408B-C200-ED821EB8FB25}"/>
+              </a:ext>
+            </a:extLst>
+          </p:cNvPr>
+          <p:cNvSpPr txBox="1"/>
+          <p:nvPr/>
+        </p:nvSpPr>
+        <p:spPr>
+          <a:xfrm>
+            <a:off x="1338470" y="3671575"/>
+            <a:ext cx="6732104" cy="1200329"/>
+          </a:xfrm>
+          <a:prstGeom prst="rect">
+            <a:avLst/>
+          </a:prstGeom>
+          <a:noFill/>
+        </p:spPr>
+        <p:txBody>
+          <a:bodyPr wrap="square" rtlCol="0">
+            <a:spAutoFit/>
+          </a:bodyPr>
+          <a:lstStyle/>
+          <a:p>
+            <a:pPr marL="285750" indent="-285750">
+              <a:buFont typeface="Arial" panose="020B0604020202020204" pitchFamily="34" charset="0"/>
+              <a:buChar char="•"/>
+            </a:pPr>
+            <a:r>
+              <a:rPr lang="en-GB" b="1" dirty="0">
+                <a:latin typeface="Calibri" panose="020F0502020204030204" pitchFamily="34" charset="0"/>
+                <a:ea typeface="Calibri" panose="020F0502020204030204" pitchFamily="34" charset="0"/>
+                <a:cs typeface="Calibri" panose="020F0502020204030204" pitchFamily="34" charset="0"/>
+              </a:rPr>
+              <a:t>Set up a machine learning environment from scratch</a:t>
+            </a:r>
+          </a:p>
+          <a:p>
+            <a:pPr marL="285750" indent="-285750">
+              <a:buFont typeface="Arial" panose="020B0604020202020204" pitchFamily="34" charset="0"/>
+              <a:buChar char="•"/>
+            </a:pPr>
+            <a:r>
+              <a:rPr lang="en-GB" b="1" dirty="0">
+                <a:latin typeface="Calibri" panose="020F0502020204030204" pitchFamily="34" charset="0"/>
+                <a:ea typeface="Calibri" panose="020F0502020204030204" pitchFamily="34" charset="0"/>
+                <a:cs typeface="Calibri" panose="020F0502020204030204" pitchFamily="34" charset="0"/>
+              </a:rPr>
+              <a:t>Basic utility programming tasks </a:t>
+            </a:r>
+          </a:p>
+          <a:p>
+            <a:pPr marL="285750" indent="-285750">
+              <a:buFont typeface="Arial" panose="020B0604020202020204" pitchFamily="34" charset="0"/>
+              <a:buChar char="•"/>
+            </a:pPr>
+            <a:r>
+              <a:rPr lang="en-GB" b="1" dirty="0">
+                <a:latin typeface="Calibri" panose="020F0502020204030204" pitchFamily="34" charset="0"/>
+                <a:ea typeface="Calibri" panose="020F0502020204030204" pitchFamily="34" charset="0"/>
+                <a:cs typeface="Calibri" panose="020F0502020204030204" pitchFamily="34" charset="0"/>
+              </a:rPr>
+              <a:t>Train your first neural network </a:t>
+            </a:r>
+          </a:p>
+          <a:p>
+            <a:pPr marL="285750" indent="-285750">
+              <a:buFont typeface="Arial" panose="020B0604020202020204" pitchFamily="34" charset="0"/>
+              <a:buChar char="•"/>
+            </a:pPr>
+            <a:r>
+              <a:rPr lang="en-GB" b="1" dirty="0">
+                <a:latin typeface="Calibri" panose="020F0502020204030204" pitchFamily="34" charset="0"/>
+                <a:ea typeface="Calibri" panose="020F0502020204030204" pitchFamily="34" charset="0"/>
+                <a:cs typeface="Calibri" panose="020F0502020204030204" pitchFamily="34" charset="0"/>
+              </a:rPr>
+              <a:t>How to continue learning after this workshop</a:t>
+            </a:r>
           </a:p>
         </p:txBody>
       </p:sp>
     </p:spTree>
     <p:extLst>
       <p:ext uri="{BB962C8B-B14F-4D97-AF65-F5344CB8AC3E}">
-        <p14:creationId xmlns:p14="http://schemas.microsoft.com/office/powerpoint/2010/main" val="2762032589"/>
+        <p14:creationId xmlns:p14="http://schemas.microsoft.com/office/powerpoint/2010/main" val="1787536402"/>
       </p:ext>
     </p:extLst>
   </p:cSld>
@@ -3478,12 +3887,129 @@
           <a:chExt cx="0" cy="0"/>
         </a:xfrm>
       </p:grpSpPr>
+      <p:sp>
+        <p:nvSpPr>
+          <p:cNvPr id="6" name="TextBox 5">
+            <a:extLst>
+              <a:ext uri="{FF2B5EF4-FFF2-40B4-BE49-F238E27FC236}">
+                <a16:creationId xmlns:a16="http://schemas.microsoft.com/office/drawing/2014/main" id="{500339EC-728B-B2B2-3A3C-4695FAD70119}"/>
+              </a:ext>
+            </a:extLst>
+          </p:cNvPr>
+          <p:cNvSpPr txBox="1"/>
+          <p:nvPr/>
+        </p:nvSpPr>
+        <p:spPr>
+          <a:xfrm>
+            <a:off x="384419" y="264832"/>
+            <a:ext cx="10958170" cy="523220"/>
+          </a:xfrm>
+          <a:prstGeom prst="rect">
+            <a:avLst/>
+          </a:prstGeom>
+          <a:noFill/>
+        </p:spPr>
+        <p:txBody>
+          <a:bodyPr wrap="square" rtlCol="0">
+            <a:spAutoFit/>
+          </a:bodyPr>
+          <a:lstStyle/>
+          <a:p>
+            <a:r>
+              <a:rPr lang="en-GB" sz="2800" b="1" dirty="0">
+                <a:latin typeface="Calibri" panose="020F0502020204030204" pitchFamily="34" charset="0"/>
+                <a:ea typeface="Calibri" panose="020F0502020204030204" pitchFamily="34" charset="0"/>
+                <a:cs typeface="Calibri" panose="020F0502020204030204" pitchFamily="34" charset="0"/>
+              </a:rPr>
+              <a:t>Things we need</a:t>
+            </a:r>
+            <a:endParaRPr lang="en-GB" sz="2800" b="1" noProof="0" dirty="0">
+              <a:solidFill>
+                <a:srgbClr val="FF0000"/>
+              </a:solidFill>
+              <a:latin typeface="Calibri" panose="020F0502020204030204" pitchFamily="34" charset="0"/>
+              <a:ea typeface="Calibri" panose="020F0502020204030204" pitchFamily="34" charset="0"/>
+              <a:cs typeface="Calibri" panose="020F0502020204030204" pitchFamily="34" charset="0"/>
+            </a:endParaRPr>
+          </a:p>
+        </p:txBody>
+      </p:sp>
+      <p:sp>
+        <p:nvSpPr>
+          <p:cNvPr id="7" name="TextBox 6">
+            <a:extLst>
+              <a:ext uri="{FF2B5EF4-FFF2-40B4-BE49-F238E27FC236}">
+                <a16:creationId xmlns:a16="http://schemas.microsoft.com/office/drawing/2014/main" id="{30CDB3A7-0148-9238-3148-CA3253E7E9C0}"/>
+              </a:ext>
+            </a:extLst>
+          </p:cNvPr>
+          <p:cNvSpPr txBox="1"/>
+          <p:nvPr/>
+        </p:nvSpPr>
+        <p:spPr>
+          <a:xfrm>
+            <a:off x="1205950" y="1206308"/>
+            <a:ext cx="2716694" cy="369332"/>
+          </a:xfrm>
+          <a:prstGeom prst="rect">
+            <a:avLst/>
+          </a:prstGeom>
+          <a:noFill/>
+        </p:spPr>
+        <p:txBody>
+          <a:bodyPr wrap="square" rtlCol="0">
+            <a:spAutoFit/>
+          </a:bodyPr>
+          <a:lstStyle/>
+          <a:p>
+            <a:r>
+              <a:rPr lang="en-GB" dirty="0"/>
+              <a:t>A code editor</a:t>
+            </a:r>
+          </a:p>
+        </p:txBody>
+      </p:sp>
+      <p:sp>
+        <p:nvSpPr>
+          <p:cNvPr id="8" name="TextBox 7">
+            <a:extLst>
+              <a:ext uri="{FF2B5EF4-FFF2-40B4-BE49-F238E27FC236}">
+                <a16:creationId xmlns:a16="http://schemas.microsoft.com/office/drawing/2014/main" id="{0C7EDAE8-7E72-E184-2B9A-463E158C531F}"/>
+              </a:ext>
+            </a:extLst>
+          </p:cNvPr>
+          <p:cNvSpPr txBox="1"/>
+          <p:nvPr/>
+        </p:nvSpPr>
+        <p:spPr>
+          <a:xfrm>
+            <a:off x="7023653" y="1280563"/>
+            <a:ext cx="3352800" cy="369332"/>
+          </a:xfrm>
+          <a:prstGeom prst="rect">
+            <a:avLst/>
+          </a:prstGeom>
+          <a:noFill/>
+        </p:spPr>
+        <p:txBody>
+          <a:bodyPr wrap="square" rtlCol="0">
+            <a:spAutoFit/>
+          </a:bodyPr>
+          <a:lstStyle/>
+          <a:p>
+            <a:r>
+              <a:rPr lang="en-GB" dirty="0"/>
+              <a:t>A programming language</a:t>
+            </a:r>
+          </a:p>
+        </p:txBody>
+      </p:sp>
       <p:pic>
         <p:nvPicPr>
-          <p:cNvPr id="9" name="Picture 8">
-            <a:extLst>
-              <a:ext uri="{FF2B5EF4-FFF2-40B4-BE49-F238E27FC236}">
-                <a16:creationId xmlns:a16="http://schemas.microsoft.com/office/drawing/2014/main" id="{852AF64C-EA0A-C67E-A0C7-E0015B1CB812}"/>
+          <p:cNvPr id="10" name="Picture 9">
+            <a:extLst>
+              <a:ext uri="{FF2B5EF4-FFF2-40B4-BE49-F238E27FC236}">
+                <a16:creationId xmlns:a16="http://schemas.microsoft.com/office/drawing/2014/main" id="{AD328ACF-2063-BBBE-0BF5-909B0DB373B4}"/>
               </a:ext>
             </a:extLst>
           </p:cNvPr>
@@ -3500,59 +4026,53 @@
         </p:blipFill>
         <p:spPr>
           <a:xfrm>
-            <a:off x="1158731" y="1527261"/>
-            <a:ext cx="8464985" cy="4819898"/>
+            <a:off x="384419" y="1993896"/>
+            <a:ext cx="4377613" cy="4151671"/>
           </a:xfrm>
           <a:prstGeom prst="rect">
             <a:avLst/>
           </a:prstGeom>
+          <a:ln>
+            <a:solidFill>
+              <a:schemeClr val="tx1"/>
+            </a:solidFill>
+          </a:ln>
         </p:spPr>
       </p:pic>
-      <p:sp>
-        <p:nvSpPr>
-          <p:cNvPr id="10" name="TextBox 9">
-            <a:extLst>
-              <a:ext uri="{FF2B5EF4-FFF2-40B4-BE49-F238E27FC236}">
-                <a16:creationId xmlns:a16="http://schemas.microsoft.com/office/drawing/2014/main" id="{C2280095-9EA8-BA80-6FC1-2D7DC0EBA44F}"/>
-              </a:ext>
-            </a:extLst>
-          </p:cNvPr>
-          <p:cNvSpPr txBox="1"/>
+      <p:pic>
+        <p:nvPicPr>
+          <p:cNvPr id="12" name="Picture 11">
+            <a:extLst>
+              <a:ext uri="{FF2B5EF4-FFF2-40B4-BE49-F238E27FC236}">
+                <a16:creationId xmlns:a16="http://schemas.microsoft.com/office/drawing/2014/main" id="{E1BD8311-04EA-3132-848B-57A3920C2B9A}"/>
+              </a:ext>
+            </a:extLst>
+          </p:cNvPr>
+          <p:cNvPicPr>
+            <a:picLocks noChangeAspect="1"/>
+          </p:cNvPicPr>
           <p:nvPr/>
-        </p:nvSpPr>
-        <p:spPr>
-          <a:xfrm>
-            <a:off x="5592164" y="1527261"/>
-            <a:ext cx="1630675" cy="369332"/>
+        </p:nvPicPr>
+        <p:blipFill>
+          <a:blip r:embed="rId3"/>
+          <a:stretch>
+            <a:fillRect/>
+          </a:stretch>
+        </p:blipFill>
+        <p:spPr>
+          <a:xfrm>
+            <a:off x="5148967" y="2215997"/>
+            <a:ext cx="6797371" cy="3256287"/>
           </a:xfrm>
           <a:prstGeom prst="rect">
             <a:avLst/>
           </a:prstGeom>
-          <a:noFill/>
-          <a:ln w="12700">
-            <a:solidFill>
-              <a:srgbClr val="00B050"/>
-            </a:solidFill>
-          </a:ln>
-        </p:spPr>
-        <p:txBody>
-          <a:bodyPr wrap="square" rtlCol="0">
-            <a:spAutoFit/>
-          </a:bodyPr>
-          <a:lstStyle/>
-          <a:p>
-            <a:endParaRPr lang="LID4096" dirty="0">
-              <a:solidFill>
-                <a:srgbClr val="FF0000"/>
-              </a:solidFill>
-            </a:endParaRPr>
-          </a:p>
-        </p:txBody>
-      </p:sp>
+        </p:spPr>
+      </p:pic>
     </p:spTree>
     <p:extLst>
       <p:ext uri="{BB962C8B-B14F-4D97-AF65-F5344CB8AC3E}">
-        <p14:creationId xmlns:p14="http://schemas.microsoft.com/office/powerpoint/2010/main" val="705192938"/>
+        <p14:creationId xmlns:p14="http://schemas.microsoft.com/office/powerpoint/2010/main" val="659179869"/>
       </p:ext>
     </p:extLst>
   </p:cSld>
@@ -3579,12 +4099,70 @@
           <a:chExt cx="0" cy="0"/>
         </a:xfrm>
       </p:grpSpPr>
+      <p:sp>
+        <p:nvSpPr>
+          <p:cNvPr id="9" name="TextBox 8">
+            <a:extLst>
+              <a:ext uri="{FF2B5EF4-FFF2-40B4-BE49-F238E27FC236}">
+                <a16:creationId xmlns:a16="http://schemas.microsoft.com/office/drawing/2014/main" id="{E2D13DC4-FA3D-4363-74DD-3AB55C0495B7}"/>
+              </a:ext>
+            </a:extLst>
+          </p:cNvPr>
+          <p:cNvSpPr txBox="1"/>
+          <p:nvPr/>
+        </p:nvSpPr>
+        <p:spPr>
+          <a:xfrm>
+            <a:off x="6212089" y="508025"/>
+            <a:ext cx="6096000" cy="646331"/>
+          </a:xfrm>
+          <a:prstGeom prst="rect">
+            <a:avLst/>
+          </a:prstGeom>
+          <a:noFill/>
+        </p:spPr>
+        <p:txBody>
+          <a:bodyPr wrap="square">
+            <a:spAutoFit/>
+          </a:bodyPr>
+          <a:lstStyle/>
+          <a:p>
+            <a:r>
+              <a:rPr lang="en-GB" b="1" dirty="0">
+                <a:solidFill>
+                  <a:srgbClr val="C00000"/>
+                </a:solidFill>
+                <a:hlinkClick r:id="rId2">
+                  <a:extLst>
+                    <a:ext uri="{A12FA001-AC4F-418D-AE19-62706E023703}">
+                      <ahyp:hlinkClr xmlns:ahyp="http://schemas.microsoft.com/office/drawing/2018/hyperlinkcolor" val="tx"/>
+                    </a:ext>
+                  </a:extLst>
+                </a:hlinkClick>
+              </a:rPr>
+              <a:t>https://code.visualstudio.com/download</a:t>
+            </a:r>
+            <a:endParaRPr lang="en-GB" b="1" dirty="0">
+              <a:solidFill>
+                <a:srgbClr val="C00000"/>
+              </a:solidFill>
+            </a:endParaRPr>
+          </a:p>
+          <a:p>
+            <a:endParaRPr lang="en-GB" b="1" dirty="0">
+              <a:solidFill>
+                <a:srgbClr val="C00000"/>
+              </a:solidFill>
+            </a:endParaRPr>
+          </a:p>
+        </p:txBody>
+      </p:sp>
       <p:pic>
         <p:nvPicPr>
-          <p:cNvPr id="5" name="Picture 4">
-            <a:extLst>
-              <a:ext uri="{FF2B5EF4-FFF2-40B4-BE49-F238E27FC236}">
-                <a16:creationId xmlns:a16="http://schemas.microsoft.com/office/drawing/2014/main" id="{BCB6BB37-8A86-8364-FAE7-E38B71E19A9C}"/>
+          <p:cNvPr id="11" name="Picture 10">
+            <a:extLst>
+              <a:ext uri="{FF2B5EF4-FFF2-40B4-BE49-F238E27FC236}">
+                <a16:creationId xmlns:a16="http://schemas.microsoft.com/office/drawing/2014/main" id="{0482D227-DEE4-C705-BA02-1F7B0CBD756B}"/>
               </a:ext>
             </a:extLst>
           </p:cNvPr>
@@ -3594,27 +4172,58 @@
           <p:nvPr/>
         </p:nvPicPr>
         <p:blipFill>
-          <a:blip r:embed="rId2"/>
+          <a:blip r:embed="rId3"/>
           <a:stretch>
             <a:fillRect/>
           </a:stretch>
         </p:blipFill>
         <p:spPr>
           <a:xfrm>
-            <a:off x="585408" y="2172569"/>
-            <a:ext cx="11284530" cy="1371670"/>
+            <a:off x="258891" y="1888753"/>
+            <a:ext cx="4488572" cy="3839049"/>
           </a:xfrm>
           <a:prstGeom prst="rect">
             <a:avLst/>
           </a:prstGeom>
         </p:spPr>
       </p:pic>
-      <p:sp>
-        <p:nvSpPr>
-          <p:cNvPr id="6" name="TextBox 5">
-            <a:extLst>
-              <a:ext uri="{FF2B5EF4-FFF2-40B4-BE49-F238E27FC236}">
-                <a16:creationId xmlns:a16="http://schemas.microsoft.com/office/drawing/2014/main" id="{F013B22F-D4D9-8A3C-56ED-46B16FFA0E81}"/>
+      <p:pic>
+        <p:nvPicPr>
+          <p:cNvPr id="13" name="Picture 12">
+            <a:extLst>
+              <a:ext uri="{FF2B5EF4-FFF2-40B4-BE49-F238E27FC236}">
+                <a16:creationId xmlns:a16="http://schemas.microsoft.com/office/drawing/2014/main" id="{8B4E67D0-755C-9830-B03E-5A45398A1894}"/>
+              </a:ext>
+            </a:extLst>
+          </p:cNvPr>
+          <p:cNvPicPr>
+            <a:picLocks noChangeAspect="1"/>
+          </p:cNvPicPr>
+          <p:nvPr/>
+        </p:nvPicPr>
+        <p:blipFill>
+          <a:blip r:embed="rId4"/>
+          <a:srcRect l="22800" t="17848" r="21280"/>
+          <a:stretch>
+            <a:fillRect/>
+          </a:stretch>
+        </p:blipFill>
+        <p:spPr>
+          <a:xfrm>
+            <a:off x="5237683" y="1081204"/>
+            <a:ext cx="6817766" cy="5169120"/>
+          </a:xfrm>
+          <a:prstGeom prst="rect">
+            <a:avLst/>
+          </a:prstGeom>
+        </p:spPr>
+      </p:pic>
+      <p:sp>
+        <p:nvSpPr>
+          <p:cNvPr id="14" name="TextBox 13">
+            <a:extLst>
+              <a:ext uri="{FF2B5EF4-FFF2-40B4-BE49-F238E27FC236}">
+                <a16:creationId xmlns:a16="http://schemas.microsoft.com/office/drawing/2014/main" id="{322619D9-9933-15E7-7B09-58501E63070D}"/>
               </a:ext>
             </a:extLst>
           </p:cNvPr>
@@ -3623,18 +4232,13 @@
         </p:nvSpPr>
         <p:spPr>
           <a:xfrm>
-            <a:off x="5018841" y="2105569"/>
-            <a:ext cx="1630675" cy="369332"/>
+            <a:off x="395020" y="1402732"/>
+            <a:ext cx="3306471" cy="369332"/>
           </a:xfrm>
           <a:prstGeom prst="rect">
             <a:avLst/>
           </a:prstGeom>
           <a:noFill/>
-          <a:ln w="12700">
-            <a:solidFill>
-              <a:srgbClr val="00B050"/>
-            </a:solidFill>
-          </a:ln>
         </p:spPr>
         <p:txBody>
           <a:bodyPr wrap="square" rtlCol="0">
@@ -3642,18 +4246,17 @@
           </a:bodyPr>
           <a:lstStyle/>
           <a:p>
-            <a:endParaRPr lang="LID4096" dirty="0">
-              <a:solidFill>
-                <a:srgbClr val="FF0000"/>
-              </a:solidFill>
-            </a:endParaRPr>
+            <a:r>
+              <a:rPr lang="en-GB" dirty="0"/>
+              <a:t>Via Microsoft software centre</a:t>
+            </a:r>
           </a:p>
         </p:txBody>
       </p:sp>
     </p:spTree>
     <p:extLst>
       <p:ext uri="{BB962C8B-B14F-4D97-AF65-F5344CB8AC3E}">
-        <p14:creationId xmlns:p14="http://schemas.microsoft.com/office/powerpoint/2010/main" val="1376836154"/>
+        <p14:creationId xmlns:p14="http://schemas.microsoft.com/office/powerpoint/2010/main" val="516005526"/>
       </p:ext>
     </p:extLst>
   </p:cSld>
@@ -3685,7 +4288,7 @@
           <p:cNvPr id="5" name="Picture 4">
             <a:extLst>
               <a:ext uri="{FF2B5EF4-FFF2-40B4-BE49-F238E27FC236}">
-                <a16:creationId xmlns:a16="http://schemas.microsoft.com/office/drawing/2014/main" id="{3EFA074D-571E-BFA7-87E0-8D77CB0296A6}"/>
+                <a16:creationId xmlns:a16="http://schemas.microsoft.com/office/drawing/2014/main" id="{AFD4223C-88E2-EF15-CF02-C7AFC58F8662}"/>
               </a:ext>
             </a:extLst>
           </p:cNvPr>
@@ -3696,14 +4299,15 @@
         </p:nvPicPr>
         <p:blipFill>
           <a:blip r:embed="rId2"/>
+          <a:srcRect b="14588"/>
           <a:stretch>
             <a:fillRect/>
           </a:stretch>
         </p:blipFill>
         <p:spPr>
           <a:xfrm>
-            <a:off x="737392" y="2134847"/>
-            <a:ext cx="9722350" cy="1886047"/>
+            <a:off x="308271" y="2394811"/>
+            <a:ext cx="11151173" cy="4198144"/>
           </a:xfrm>
           <a:prstGeom prst="rect">
             <a:avLst/>
@@ -3715,7 +4319,7 @@
           <p:cNvPr id="6" name="TextBox 5">
             <a:extLst>
               <a:ext uri="{FF2B5EF4-FFF2-40B4-BE49-F238E27FC236}">
-                <a16:creationId xmlns:a16="http://schemas.microsoft.com/office/drawing/2014/main" id="{02FF913E-5F26-5D6A-C4C0-D2FD4527D078}"/>
+                <a16:creationId xmlns:a16="http://schemas.microsoft.com/office/drawing/2014/main" id="{B281FA3D-D1AC-7557-2DC9-999E30DD5C93}"/>
               </a:ext>
             </a:extLst>
           </p:cNvPr>
@@ -3724,8 +4328,8 @@
         </p:nvSpPr>
         <p:spPr>
           <a:xfrm>
-            <a:off x="5179775" y="2632264"/>
-            <a:ext cx="1725774" cy="388914"/>
+            <a:off x="4747565" y="2886427"/>
+            <a:ext cx="4206240" cy="369332"/>
           </a:xfrm>
           <a:prstGeom prst="rect">
             <a:avLst/>
@@ -3751,42 +4355,12 @@
           </a:p>
         </p:txBody>
       </p:sp>
-      <p:pic>
-        <p:nvPicPr>
-          <p:cNvPr id="8" name="Picture 7">
-            <a:extLst>
-              <a:ext uri="{FF2B5EF4-FFF2-40B4-BE49-F238E27FC236}">
-                <a16:creationId xmlns:a16="http://schemas.microsoft.com/office/drawing/2014/main" id="{B102BDD2-32A0-B173-0FA6-6F58107903AE}"/>
-              </a:ext>
-            </a:extLst>
-          </p:cNvPr>
-          <p:cNvPicPr>
-            <a:picLocks noChangeAspect="1"/>
-          </p:cNvPicPr>
-          <p:nvPr/>
-        </p:nvPicPr>
-        <p:blipFill>
-          <a:blip r:embed="rId3"/>
-          <a:stretch>
-            <a:fillRect/>
-          </a:stretch>
-        </p:blipFill>
-        <p:spPr>
-          <a:xfrm>
-            <a:off x="724692" y="4659959"/>
-            <a:ext cx="9735050" cy="2000353"/>
-          </a:xfrm>
-          <a:prstGeom prst="rect">
-            <a:avLst/>
-          </a:prstGeom>
-        </p:spPr>
-      </p:pic>
-      <p:sp>
-        <p:nvSpPr>
-          <p:cNvPr id="9" name="TextBox 8">
-            <a:extLst>
-              <a:ext uri="{FF2B5EF4-FFF2-40B4-BE49-F238E27FC236}">
-                <a16:creationId xmlns:a16="http://schemas.microsoft.com/office/drawing/2014/main" id="{1E8A5915-265C-7976-2B50-58AD585F5376}"/>
+      <p:sp>
+        <p:nvSpPr>
+          <p:cNvPr id="2" name="TextBox 1">
+            <a:extLst>
+              <a:ext uri="{FF2B5EF4-FFF2-40B4-BE49-F238E27FC236}">
+                <a16:creationId xmlns:a16="http://schemas.microsoft.com/office/drawing/2014/main" id="{4D5D4813-06E6-6E7D-8CC2-B05B24AEEB32}"/>
               </a:ext>
             </a:extLst>
           </p:cNvPr>
@@ -3795,18 +4369,13 @@
         </p:nvSpPr>
         <p:spPr>
           <a:xfrm>
-            <a:off x="5179775" y="5147473"/>
-            <a:ext cx="1725774" cy="388914"/>
+            <a:off x="384419" y="264832"/>
+            <a:ext cx="10958170" cy="523220"/>
           </a:xfrm>
           <a:prstGeom prst="rect">
             <a:avLst/>
           </a:prstGeom>
           <a:noFill/>
-          <a:ln w="12700">
-            <a:solidFill>
-              <a:srgbClr val="00B050"/>
-            </a:solidFill>
-          </a:ln>
         </p:spPr>
         <p:txBody>
           <a:bodyPr wrap="square" rtlCol="0">
@@ -3814,18 +4383,266 @@
           </a:bodyPr>
           <a:lstStyle/>
           <a:p>
-            <a:endParaRPr lang="LID4096" dirty="0">
+            <a:r>
+              <a:rPr lang="en-GB" sz="2800" b="1" dirty="0">
+                <a:latin typeface="Calibri" panose="020F0502020204030204" pitchFamily="34" charset="0"/>
+                <a:ea typeface="Calibri" panose="020F0502020204030204" pitchFamily="34" charset="0"/>
+                <a:cs typeface="Calibri" panose="020F0502020204030204" pitchFamily="34" charset="0"/>
+              </a:rPr>
+              <a:t>Install Julia via </a:t>
+            </a:r>
+            <a:r>
+              <a:rPr lang="en-GB" sz="2800" b="1" dirty="0" err="1">
+                <a:latin typeface="Calibri" panose="020F0502020204030204" pitchFamily="34" charset="0"/>
+                <a:ea typeface="Calibri" panose="020F0502020204030204" pitchFamily="34" charset="0"/>
+                <a:cs typeface="Calibri" panose="020F0502020204030204" pitchFamily="34" charset="0"/>
+              </a:rPr>
+              <a:t>VSCode</a:t>
+            </a:r>
+            <a:endParaRPr lang="en-GB" sz="2800" b="1" noProof="0" dirty="0">
               <a:solidFill>
                 <a:srgbClr val="FF0000"/>
               </a:solidFill>
+              <a:latin typeface="Calibri" panose="020F0502020204030204" pitchFamily="34" charset="0"/>
+              <a:ea typeface="Calibri" panose="020F0502020204030204" pitchFamily="34" charset="0"/>
+              <a:cs typeface="Calibri" panose="020F0502020204030204" pitchFamily="34" charset="0"/>
             </a:endParaRPr>
+          </a:p>
+        </p:txBody>
+      </p:sp>
+      <p:sp>
+        <p:nvSpPr>
+          <p:cNvPr id="4" name="TextBox 3">
+            <a:extLst>
+              <a:ext uri="{FF2B5EF4-FFF2-40B4-BE49-F238E27FC236}">
+                <a16:creationId xmlns:a16="http://schemas.microsoft.com/office/drawing/2014/main" id="{FE4DA3AB-A68B-17F0-4B76-172F7CA2A73B}"/>
+              </a:ext>
+            </a:extLst>
+          </p:cNvPr>
+          <p:cNvSpPr txBox="1"/>
+          <p:nvPr/>
+        </p:nvSpPr>
+        <p:spPr>
+          <a:xfrm>
+            <a:off x="4199667" y="788052"/>
+            <a:ext cx="7866438" cy="369332"/>
+          </a:xfrm>
+          <a:prstGeom prst="rect">
+            <a:avLst/>
+          </a:prstGeom>
+          <a:noFill/>
+          <a:ln>
+            <a:solidFill>
+              <a:schemeClr val="bg1">
+                <a:lumMod val="95000"/>
+              </a:schemeClr>
+            </a:solidFill>
+          </a:ln>
+        </p:spPr>
+        <p:txBody>
+          <a:bodyPr wrap="square">
+            <a:spAutoFit/>
+          </a:bodyPr>
+          <a:lstStyle/>
+          <a:p>
+            <a:r>
+              <a:rPr lang="en-GB" b="1" dirty="0" err="1">
+                <a:solidFill>
+                  <a:srgbClr val="C00000"/>
+                </a:solidFill>
+                <a:latin typeface="Consolas" panose="020B0609020204030204" pitchFamily="49" charset="0"/>
+              </a:rPr>
+              <a:t>winget</a:t>
+            </a:r>
+            <a:r>
+              <a:rPr lang="en-GB" b="1" dirty="0">
+                <a:solidFill>
+                  <a:srgbClr val="C00000"/>
+                </a:solidFill>
+                <a:latin typeface="Consolas" panose="020B0609020204030204" pitchFamily="49" charset="0"/>
+              </a:rPr>
+              <a:t> install --name Julia --id 9NJNWW8PVKMN -e -s </a:t>
+            </a:r>
+            <a:r>
+              <a:rPr lang="en-GB" b="1" dirty="0" err="1">
+                <a:solidFill>
+                  <a:srgbClr val="C00000"/>
+                </a:solidFill>
+                <a:latin typeface="Consolas" panose="020B0609020204030204" pitchFamily="49" charset="0"/>
+              </a:rPr>
+              <a:t>msstore</a:t>
+            </a:r>
+            <a:endParaRPr lang="en-GB" b="1" dirty="0">
+              <a:solidFill>
+                <a:srgbClr val="C00000"/>
+              </a:solidFill>
+              <a:latin typeface="Consolas" panose="020B0609020204030204" pitchFamily="49" charset="0"/>
+            </a:endParaRPr>
+          </a:p>
+        </p:txBody>
+      </p:sp>
+      <p:sp>
+        <p:nvSpPr>
+          <p:cNvPr id="7" name="TextBox 6">
+            <a:extLst>
+              <a:ext uri="{FF2B5EF4-FFF2-40B4-BE49-F238E27FC236}">
+                <a16:creationId xmlns:a16="http://schemas.microsoft.com/office/drawing/2014/main" id="{760C3BDD-72A3-D09C-6811-D7840C2F36F4}"/>
+              </a:ext>
+            </a:extLst>
+          </p:cNvPr>
+          <p:cNvSpPr txBox="1"/>
+          <p:nvPr/>
+        </p:nvSpPr>
+        <p:spPr>
+          <a:xfrm>
+            <a:off x="2066067" y="805856"/>
+            <a:ext cx="2300524" cy="338554"/>
+          </a:xfrm>
+          <a:prstGeom prst="rect">
+            <a:avLst/>
+          </a:prstGeom>
+          <a:noFill/>
+        </p:spPr>
+        <p:txBody>
+          <a:bodyPr wrap="square" rtlCol="0">
+            <a:spAutoFit/>
+          </a:bodyPr>
+          <a:lstStyle/>
+          <a:p>
+            <a:r>
+              <a:rPr lang="en-GB" sz="1600" b="1" dirty="0">
+                <a:latin typeface="Calibri" panose="020F0502020204030204" pitchFamily="34" charset="0"/>
+                <a:ea typeface="Calibri" panose="020F0502020204030204" pitchFamily="34" charset="0"/>
+                <a:cs typeface="Calibri" panose="020F0502020204030204" pitchFamily="34" charset="0"/>
+              </a:rPr>
+              <a:t>Powershell (Windows)</a:t>
+            </a:r>
+          </a:p>
+        </p:txBody>
+      </p:sp>
+      <p:sp>
+        <p:nvSpPr>
+          <p:cNvPr id="9" name="TextBox 8">
+            <a:extLst>
+              <a:ext uri="{FF2B5EF4-FFF2-40B4-BE49-F238E27FC236}">
+                <a16:creationId xmlns:a16="http://schemas.microsoft.com/office/drawing/2014/main" id="{BE20CC4F-16D9-B171-0EA6-9D882DC46BBD}"/>
+              </a:ext>
+            </a:extLst>
+          </p:cNvPr>
+          <p:cNvSpPr txBox="1"/>
+          <p:nvPr/>
+        </p:nvSpPr>
+        <p:spPr>
+          <a:xfrm>
+            <a:off x="5883857" y="1617615"/>
+            <a:ext cx="6096000" cy="369332"/>
+          </a:xfrm>
+          <a:prstGeom prst="rect">
+            <a:avLst/>
+          </a:prstGeom>
+          <a:noFill/>
+          <a:ln>
+            <a:solidFill>
+              <a:schemeClr val="bg1">
+                <a:lumMod val="95000"/>
+              </a:schemeClr>
+            </a:solidFill>
+          </a:ln>
+        </p:spPr>
+        <p:txBody>
+          <a:bodyPr wrap="square">
+            <a:spAutoFit/>
+          </a:bodyPr>
+          <a:lstStyle/>
+          <a:p>
+            <a:r>
+              <a:rPr lang="en-GB" b="1" dirty="0">
+                <a:solidFill>
+                  <a:srgbClr val="C00000"/>
+                </a:solidFill>
+                <a:latin typeface="Consolas" panose="020B0609020204030204" pitchFamily="49" charset="0"/>
+              </a:rPr>
+              <a:t>curl -</a:t>
+            </a:r>
+            <a:r>
+              <a:rPr lang="en-GB" b="1" dirty="0" err="1">
+                <a:solidFill>
+                  <a:srgbClr val="C00000"/>
+                </a:solidFill>
+                <a:latin typeface="Consolas" panose="020B0609020204030204" pitchFamily="49" charset="0"/>
+              </a:rPr>
+              <a:t>fsSL</a:t>
+            </a:r>
+            <a:r>
+              <a:rPr lang="en-GB" b="1" dirty="0">
+                <a:solidFill>
+                  <a:srgbClr val="C00000"/>
+                </a:solidFill>
+                <a:latin typeface="Consolas" panose="020B0609020204030204" pitchFamily="49" charset="0"/>
+              </a:rPr>
+              <a:t> https://install.julialang.org | </a:t>
+            </a:r>
+            <a:r>
+              <a:rPr lang="en-GB" b="1" dirty="0" err="1">
+                <a:solidFill>
+                  <a:srgbClr val="C00000"/>
+                </a:solidFill>
+                <a:latin typeface="Consolas" panose="020B0609020204030204" pitchFamily="49" charset="0"/>
+              </a:rPr>
+              <a:t>sh</a:t>
+            </a:r>
+            <a:endParaRPr lang="en-GB" b="1" dirty="0">
+              <a:solidFill>
+                <a:srgbClr val="C00000"/>
+              </a:solidFill>
+              <a:latin typeface="Consolas" panose="020B0609020204030204" pitchFamily="49" charset="0"/>
+            </a:endParaRPr>
+          </a:p>
+        </p:txBody>
+      </p:sp>
+      <p:sp>
+        <p:nvSpPr>
+          <p:cNvPr id="10" name="TextBox 9">
+            <a:extLst>
+              <a:ext uri="{FF2B5EF4-FFF2-40B4-BE49-F238E27FC236}">
+                <a16:creationId xmlns:a16="http://schemas.microsoft.com/office/drawing/2014/main" id="{28526879-E274-E378-0C99-A17C789CAEBF}"/>
+              </a:ext>
+            </a:extLst>
+          </p:cNvPr>
+          <p:cNvSpPr txBox="1"/>
+          <p:nvPr/>
+        </p:nvSpPr>
+        <p:spPr>
+          <a:xfrm>
+            <a:off x="3465444" y="1636026"/>
+            <a:ext cx="2748552" cy="369332"/>
+          </a:xfrm>
+          <a:prstGeom prst="rect">
+            <a:avLst/>
+          </a:prstGeom>
+          <a:noFill/>
+        </p:spPr>
+        <p:txBody>
+          <a:bodyPr wrap="square" rtlCol="0">
+            <a:spAutoFit/>
+          </a:bodyPr>
+          <a:lstStyle/>
+          <a:p>
+            <a:r>
+              <a:rPr lang="en-GB" b="1" dirty="0">
+                <a:latin typeface="Calibri" panose="020F0502020204030204" pitchFamily="34" charset="0"/>
+                <a:ea typeface="Calibri" panose="020F0502020204030204" pitchFamily="34" charset="0"/>
+                <a:cs typeface="Calibri" panose="020F0502020204030204" pitchFamily="34" charset="0"/>
+              </a:rPr>
+              <a:t>Terminal (Linux/MacOS)</a:t>
+            </a:r>
           </a:p>
         </p:txBody>
       </p:sp>
     </p:spTree>
     <p:extLst>
       <p:ext uri="{BB962C8B-B14F-4D97-AF65-F5344CB8AC3E}">
-        <p14:creationId xmlns:p14="http://schemas.microsoft.com/office/powerpoint/2010/main" val="2332386400"/>
+        <p14:creationId xmlns:p14="http://schemas.microsoft.com/office/powerpoint/2010/main" val="2762032589"/>
       </p:ext>
     </p:extLst>
   </p:cSld>
@@ -3854,10 +4671,10 @@
       </p:grpSpPr>
       <p:pic>
         <p:nvPicPr>
-          <p:cNvPr id="5" name="Picture 4">
-            <a:extLst>
-              <a:ext uri="{FF2B5EF4-FFF2-40B4-BE49-F238E27FC236}">
-                <a16:creationId xmlns:a16="http://schemas.microsoft.com/office/drawing/2014/main" id="{80C8391F-11AC-DA42-E973-6578AC98B11A}"/>
+          <p:cNvPr id="9" name="Picture 8">
+            <a:extLst>
+              <a:ext uri="{FF2B5EF4-FFF2-40B4-BE49-F238E27FC236}">
+                <a16:creationId xmlns:a16="http://schemas.microsoft.com/office/drawing/2014/main" id="{852AF64C-EA0A-C67E-A0C7-E0015B1CB812}"/>
               </a:ext>
             </a:extLst>
           </p:cNvPr>
@@ -3874,14 +4691,571 @@
         </p:blipFill>
         <p:spPr>
           <a:xfrm>
-            <a:off x="343815" y="2032334"/>
-            <a:ext cx="11214202" cy="3320569"/>
+            <a:off x="1158731" y="1527261"/>
+            <a:ext cx="8464985" cy="4819898"/>
           </a:xfrm>
           <a:prstGeom prst="rect">
             <a:avLst/>
           </a:prstGeom>
         </p:spPr>
       </p:pic>
+      <p:sp>
+        <p:nvSpPr>
+          <p:cNvPr id="10" name="TextBox 9">
+            <a:extLst>
+              <a:ext uri="{FF2B5EF4-FFF2-40B4-BE49-F238E27FC236}">
+                <a16:creationId xmlns:a16="http://schemas.microsoft.com/office/drawing/2014/main" id="{C2280095-9EA8-BA80-6FC1-2D7DC0EBA44F}"/>
+              </a:ext>
+            </a:extLst>
+          </p:cNvPr>
+          <p:cNvSpPr txBox="1"/>
+          <p:nvPr/>
+        </p:nvSpPr>
+        <p:spPr>
+          <a:xfrm>
+            <a:off x="5592164" y="1527261"/>
+            <a:ext cx="1630675" cy="369332"/>
+          </a:xfrm>
+          <a:prstGeom prst="rect">
+            <a:avLst/>
+          </a:prstGeom>
+          <a:noFill/>
+          <a:ln w="12700">
+            <a:solidFill>
+              <a:srgbClr val="00B050"/>
+            </a:solidFill>
+          </a:ln>
+        </p:spPr>
+        <p:txBody>
+          <a:bodyPr wrap="square" rtlCol="0">
+            <a:spAutoFit/>
+          </a:bodyPr>
+          <a:lstStyle/>
+          <a:p>
+            <a:endParaRPr lang="LID4096" dirty="0">
+              <a:solidFill>
+                <a:srgbClr val="FF0000"/>
+              </a:solidFill>
+            </a:endParaRPr>
+          </a:p>
+        </p:txBody>
+      </p:sp>
+      <p:sp>
+        <p:nvSpPr>
+          <p:cNvPr id="2" name="TextBox 1">
+            <a:extLst>
+              <a:ext uri="{FF2B5EF4-FFF2-40B4-BE49-F238E27FC236}">
+                <a16:creationId xmlns:a16="http://schemas.microsoft.com/office/drawing/2014/main" id="{37071632-3ACA-22CA-20AD-E99BE15C7D58}"/>
+              </a:ext>
+            </a:extLst>
+          </p:cNvPr>
+          <p:cNvSpPr txBox="1"/>
+          <p:nvPr/>
+        </p:nvSpPr>
+        <p:spPr>
+          <a:xfrm>
+            <a:off x="384419" y="264832"/>
+            <a:ext cx="10958170" cy="523220"/>
+          </a:xfrm>
+          <a:prstGeom prst="rect">
+            <a:avLst/>
+          </a:prstGeom>
+          <a:noFill/>
+        </p:spPr>
+        <p:txBody>
+          <a:bodyPr wrap="square" rtlCol="0">
+            <a:spAutoFit/>
+          </a:bodyPr>
+          <a:lstStyle/>
+          <a:p>
+            <a:r>
+              <a:rPr lang="en-GB" sz="2800" b="1" noProof="0" dirty="0">
+                <a:latin typeface="Calibri" panose="020F0502020204030204" pitchFamily="34" charset="0"/>
+                <a:ea typeface="Calibri" panose="020F0502020204030204" pitchFamily="34" charset="0"/>
+                <a:cs typeface="Calibri" panose="020F0502020204030204" pitchFamily="34" charset="0"/>
+              </a:rPr>
+              <a:t>We’ll manage Julia installations via </a:t>
+            </a:r>
+            <a:r>
+              <a:rPr lang="en-GB" sz="2800" b="1" noProof="0" dirty="0">
+                <a:solidFill>
+                  <a:srgbClr val="FF0000"/>
+                </a:solidFill>
+                <a:latin typeface="Calibri" panose="020F0502020204030204" pitchFamily="34" charset="0"/>
+                <a:ea typeface="Calibri" panose="020F0502020204030204" pitchFamily="34" charset="0"/>
+                <a:cs typeface="Calibri" panose="020F0502020204030204" pitchFamily="34" charset="0"/>
+              </a:rPr>
+              <a:t>juliaup </a:t>
+            </a:r>
+          </a:p>
+        </p:txBody>
+      </p:sp>
+    </p:spTree>
+    <p:extLst>
+      <p:ext uri="{BB962C8B-B14F-4D97-AF65-F5344CB8AC3E}">
+        <p14:creationId xmlns:p14="http://schemas.microsoft.com/office/powerpoint/2010/main" val="705192938"/>
+      </p:ext>
+    </p:extLst>
+  </p:cSld>
+  <p:clrMapOvr>
+    <a:masterClrMapping/>
+  </p:clrMapOvr>
+</p:sld>
+</file>
+
+<file path=ppt/slides/slide7.xml><?xml version="1.0" encoding="utf-8"?>
+<p:sld xmlns:a="http://schemas.openxmlformats.org/drawingml/2006/main" xmlns:r="http://schemas.openxmlformats.org/officeDocument/2006/relationships" xmlns:p="http://schemas.openxmlformats.org/presentationml/2006/main">
+  <p:cSld>
+    <p:spTree>
+      <p:nvGrpSpPr>
+        <p:cNvPr id="1" name=""/>
+        <p:cNvGrpSpPr/>
+        <p:nvPr/>
+      </p:nvGrpSpPr>
+      <p:grpSpPr>
+        <a:xfrm>
+          <a:off x="0" y="0"/>
+          <a:ext cx="0" cy="0"/>
+          <a:chOff x="0" y="0"/>
+          <a:chExt cx="0" cy="0"/>
+        </a:xfrm>
+      </p:grpSpPr>
+      <p:pic>
+        <p:nvPicPr>
+          <p:cNvPr id="5" name="Picture 4">
+            <a:extLst>
+              <a:ext uri="{FF2B5EF4-FFF2-40B4-BE49-F238E27FC236}">
+                <a16:creationId xmlns:a16="http://schemas.microsoft.com/office/drawing/2014/main" id="{BCB6BB37-8A86-8364-FAE7-E38B71E19A9C}"/>
+              </a:ext>
+            </a:extLst>
+          </p:cNvPr>
+          <p:cNvPicPr>
+            <a:picLocks noChangeAspect="1"/>
+          </p:cNvPicPr>
+          <p:nvPr/>
+        </p:nvPicPr>
+        <p:blipFill>
+          <a:blip r:embed="rId2"/>
+          <a:stretch>
+            <a:fillRect/>
+          </a:stretch>
+        </p:blipFill>
+        <p:spPr>
+          <a:xfrm>
+            <a:off x="585408" y="2172569"/>
+            <a:ext cx="11284530" cy="1371670"/>
+          </a:xfrm>
+          <a:prstGeom prst="rect">
+            <a:avLst/>
+          </a:prstGeom>
+        </p:spPr>
+      </p:pic>
+      <p:sp>
+        <p:nvSpPr>
+          <p:cNvPr id="6" name="TextBox 5">
+            <a:extLst>
+              <a:ext uri="{FF2B5EF4-FFF2-40B4-BE49-F238E27FC236}">
+                <a16:creationId xmlns:a16="http://schemas.microsoft.com/office/drawing/2014/main" id="{F013B22F-D4D9-8A3C-56ED-46B16FFA0E81}"/>
+              </a:ext>
+            </a:extLst>
+          </p:cNvPr>
+          <p:cNvSpPr txBox="1"/>
+          <p:nvPr/>
+        </p:nvSpPr>
+        <p:spPr>
+          <a:xfrm>
+            <a:off x="5018841" y="2105569"/>
+            <a:ext cx="1630675" cy="369332"/>
+          </a:xfrm>
+          <a:prstGeom prst="rect">
+            <a:avLst/>
+          </a:prstGeom>
+          <a:noFill/>
+          <a:ln w="12700">
+            <a:solidFill>
+              <a:srgbClr val="00B050"/>
+            </a:solidFill>
+          </a:ln>
+        </p:spPr>
+        <p:txBody>
+          <a:bodyPr wrap="square" rtlCol="0">
+            <a:spAutoFit/>
+          </a:bodyPr>
+          <a:lstStyle/>
+          <a:p>
+            <a:endParaRPr lang="LID4096" dirty="0">
+              <a:solidFill>
+                <a:srgbClr val="FF0000"/>
+              </a:solidFill>
+            </a:endParaRPr>
+          </a:p>
+        </p:txBody>
+      </p:sp>
+      <p:sp>
+        <p:nvSpPr>
+          <p:cNvPr id="2" name="TextBox 1">
+            <a:extLst>
+              <a:ext uri="{FF2B5EF4-FFF2-40B4-BE49-F238E27FC236}">
+                <a16:creationId xmlns:a16="http://schemas.microsoft.com/office/drawing/2014/main" id="{F4AD410D-80E9-4668-D0B3-1AF51E11FB68}"/>
+              </a:ext>
+            </a:extLst>
+          </p:cNvPr>
+          <p:cNvSpPr txBox="1"/>
+          <p:nvPr/>
+        </p:nvSpPr>
+        <p:spPr>
+          <a:xfrm>
+            <a:off x="384419" y="264832"/>
+            <a:ext cx="10958170" cy="523220"/>
+          </a:xfrm>
+          <a:prstGeom prst="rect">
+            <a:avLst/>
+          </a:prstGeom>
+          <a:noFill/>
+        </p:spPr>
+        <p:txBody>
+          <a:bodyPr wrap="square" rtlCol="0">
+            <a:spAutoFit/>
+          </a:bodyPr>
+          <a:lstStyle/>
+          <a:p>
+            <a:r>
+              <a:rPr lang="en-GB" sz="2800" b="1" dirty="0">
+                <a:latin typeface="Calibri" panose="020F0502020204030204" pitchFamily="34" charset="0"/>
+                <a:ea typeface="Calibri" panose="020F0502020204030204" pitchFamily="34" charset="0"/>
+                <a:cs typeface="Calibri" panose="020F0502020204030204" pitchFamily="34" charset="0"/>
+              </a:rPr>
+              <a:t>Install</a:t>
+            </a:r>
+            <a:r>
+              <a:rPr lang="en-GB" sz="2800" b="1" noProof="0" dirty="0">
+                <a:latin typeface="Calibri" panose="020F0502020204030204" pitchFamily="34" charset="0"/>
+                <a:ea typeface="Calibri" panose="020F0502020204030204" pitchFamily="34" charset="0"/>
+                <a:cs typeface="Calibri" panose="020F0502020204030204" pitchFamily="34" charset="0"/>
+              </a:rPr>
+              <a:t> a specific version of Julia</a:t>
+            </a:r>
+          </a:p>
+        </p:txBody>
+      </p:sp>
+    </p:spTree>
+    <p:extLst>
+      <p:ext uri="{BB962C8B-B14F-4D97-AF65-F5344CB8AC3E}">
+        <p14:creationId xmlns:p14="http://schemas.microsoft.com/office/powerpoint/2010/main" val="1376836154"/>
+      </p:ext>
+    </p:extLst>
+  </p:cSld>
+  <p:clrMapOvr>
+    <a:masterClrMapping/>
+  </p:clrMapOvr>
+</p:sld>
+</file>
+
+<file path=ppt/slides/slide8.xml><?xml version="1.0" encoding="utf-8"?>
+<p:sld xmlns:a="http://schemas.openxmlformats.org/drawingml/2006/main" xmlns:r="http://schemas.openxmlformats.org/officeDocument/2006/relationships" xmlns:p="http://schemas.openxmlformats.org/presentationml/2006/main">
+  <p:cSld>
+    <p:spTree>
+      <p:nvGrpSpPr>
+        <p:cNvPr id="1" name=""/>
+        <p:cNvGrpSpPr/>
+        <p:nvPr/>
+      </p:nvGrpSpPr>
+      <p:grpSpPr>
+        <a:xfrm>
+          <a:off x="0" y="0"/>
+          <a:ext cx="0" cy="0"/>
+          <a:chOff x="0" y="0"/>
+          <a:chExt cx="0" cy="0"/>
+        </a:xfrm>
+      </p:grpSpPr>
+      <p:pic>
+        <p:nvPicPr>
+          <p:cNvPr id="5" name="Picture 4">
+            <a:extLst>
+              <a:ext uri="{FF2B5EF4-FFF2-40B4-BE49-F238E27FC236}">
+                <a16:creationId xmlns:a16="http://schemas.microsoft.com/office/drawing/2014/main" id="{3EFA074D-571E-BFA7-87E0-8D77CB0296A6}"/>
+              </a:ext>
+            </a:extLst>
+          </p:cNvPr>
+          <p:cNvPicPr>
+            <a:picLocks noChangeAspect="1"/>
+          </p:cNvPicPr>
+          <p:nvPr/>
+        </p:nvPicPr>
+        <p:blipFill>
+          <a:blip r:embed="rId2"/>
+          <a:stretch>
+            <a:fillRect/>
+          </a:stretch>
+        </p:blipFill>
+        <p:spPr>
+          <a:xfrm>
+            <a:off x="737392" y="2134847"/>
+            <a:ext cx="9722350" cy="1886047"/>
+          </a:xfrm>
+          <a:prstGeom prst="rect">
+            <a:avLst/>
+          </a:prstGeom>
+        </p:spPr>
+      </p:pic>
+      <p:sp>
+        <p:nvSpPr>
+          <p:cNvPr id="6" name="TextBox 5">
+            <a:extLst>
+              <a:ext uri="{FF2B5EF4-FFF2-40B4-BE49-F238E27FC236}">
+                <a16:creationId xmlns:a16="http://schemas.microsoft.com/office/drawing/2014/main" id="{02FF913E-5F26-5D6A-C4C0-D2FD4527D078}"/>
+              </a:ext>
+            </a:extLst>
+          </p:cNvPr>
+          <p:cNvSpPr txBox="1"/>
+          <p:nvPr/>
+        </p:nvSpPr>
+        <p:spPr>
+          <a:xfrm>
+            <a:off x="5179775" y="2632264"/>
+            <a:ext cx="1725774" cy="388914"/>
+          </a:xfrm>
+          <a:prstGeom prst="rect">
+            <a:avLst/>
+          </a:prstGeom>
+          <a:noFill/>
+          <a:ln w="12700">
+            <a:solidFill>
+              <a:srgbClr val="00B050"/>
+            </a:solidFill>
+          </a:ln>
+        </p:spPr>
+        <p:txBody>
+          <a:bodyPr wrap="square" rtlCol="0">
+            <a:spAutoFit/>
+          </a:bodyPr>
+          <a:lstStyle/>
+          <a:p>
+            <a:endParaRPr lang="LID4096" dirty="0">
+              <a:solidFill>
+                <a:srgbClr val="FF0000"/>
+              </a:solidFill>
+            </a:endParaRPr>
+          </a:p>
+        </p:txBody>
+      </p:sp>
+      <p:pic>
+        <p:nvPicPr>
+          <p:cNvPr id="8" name="Picture 7">
+            <a:extLst>
+              <a:ext uri="{FF2B5EF4-FFF2-40B4-BE49-F238E27FC236}">
+                <a16:creationId xmlns:a16="http://schemas.microsoft.com/office/drawing/2014/main" id="{B102BDD2-32A0-B173-0FA6-6F58107903AE}"/>
+              </a:ext>
+            </a:extLst>
+          </p:cNvPr>
+          <p:cNvPicPr>
+            <a:picLocks noChangeAspect="1"/>
+          </p:cNvPicPr>
+          <p:nvPr/>
+        </p:nvPicPr>
+        <p:blipFill>
+          <a:blip r:embed="rId3"/>
+          <a:stretch>
+            <a:fillRect/>
+          </a:stretch>
+        </p:blipFill>
+        <p:spPr>
+          <a:xfrm>
+            <a:off x="724692" y="4659959"/>
+            <a:ext cx="9735050" cy="2000353"/>
+          </a:xfrm>
+          <a:prstGeom prst="rect">
+            <a:avLst/>
+          </a:prstGeom>
+        </p:spPr>
+      </p:pic>
+      <p:sp>
+        <p:nvSpPr>
+          <p:cNvPr id="9" name="TextBox 8">
+            <a:extLst>
+              <a:ext uri="{FF2B5EF4-FFF2-40B4-BE49-F238E27FC236}">
+                <a16:creationId xmlns:a16="http://schemas.microsoft.com/office/drawing/2014/main" id="{1E8A5915-265C-7976-2B50-58AD585F5376}"/>
+              </a:ext>
+            </a:extLst>
+          </p:cNvPr>
+          <p:cNvSpPr txBox="1"/>
+          <p:nvPr/>
+        </p:nvSpPr>
+        <p:spPr>
+          <a:xfrm>
+            <a:off x="5179775" y="5147473"/>
+            <a:ext cx="1725774" cy="388914"/>
+          </a:xfrm>
+          <a:prstGeom prst="rect">
+            <a:avLst/>
+          </a:prstGeom>
+          <a:noFill/>
+          <a:ln w="12700">
+            <a:solidFill>
+              <a:srgbClr val="00B050"/>
+            </a:solidFill>
+          </a:ln>
+        </p:spPr>
+        <p:txBody>
+          <a:bodyPr wrap="square" rtlCol="0">
+            <a:spAutoFit/>
+          </a:bodyPr>
+          <a:lstStyle/>
+          <a:p>
+            <a:endParaRPr lang="LID4096" dirty="0">
+              <a:solidFill>
+                <a:srgbClr val="FF0000"/>
+              </a:solidFill>
+            </a:endParaRPr>
+          </a:p>
+        </p:txBody>
+      </p:sp>
+      <p:sp>
+        <p:nvSpPr>
+          <p:cNvPr id="2" name="TextBox 1">
+            <a:extLst>
+              <a:ext uri="{FF2B5EF4-FFF2-40B4-BE49-F238E27FC236}">
+                <a16:creationId xmlns:a16="http://schemas.microsoft.com/office/drawing/2014/main" id="{D89B2BDE-871A-E0F0-6DD5-2D91AC4BBFC7}"/>
+              </a:ext>
+            </a:extLst>
+          </p:cNvPr>
+          <p:cNvSpPr txBox="1"/>
+          <p:nvPr/>
+        </p:nvSpPr>
+        <p:spPr>
+          <a:xfrm>
+            <a:off x="384419" y="264832"/>
+            <a:ext cx="10958170" cy="523220"/>
+          </a:xfrm>
+          <a:prstGeom prst="rect">
+            <a:avLst/>
+          </a:prstGeom>
+          <a:noFill/>
+        </p:spPr>
+        <p:txBody>
+          <a:bodyPr wrap="square" rtlCol="0">
+            <a:spAutoFit/>
+          </a:bodyPr>
+          <a:lstStyle/>
+          <a:p>
+            <a:r>
+              <a:rPr lang="en-GB" sz="2800" b="1" dirty="0">
+                <a:latin typeface="Calibri" panose="020F0502020204030204" pitchFamily="34" charset="0"/>
+                <a:ea typeface="Calibri" panose="020F0502020204030204" pitchFamily="34" charset="0"/>
+                <a:cs typeface="Calibri" panose="020F0502020204030204" pitchFamily="34" charset="0"/>
+              </a:rPr>
+              <a:t>Making a specific version of Julia as your default</a:t>
+            </a:r>
+            <a:r>
+              <a:rPr lang="en-GB" sz="2800" b="1" noProof="0" dirty="0">
+                <a:latin typeface="Calibri" panose="020F0502020204030204" pitchFamily="34" charset="0"/>
+                <a:ea typeface="Calibri" panose="020F0502020204030204" pitchFamily="34" charset="0"/>
+                <a:cs typeface="Calibri" panose="020F0502020204030204" pitchFamily="34" charset="0"/>
+              </a:rPr>
+              <a:t> </a:t>
+            </a:r>
+          </a:p>
+        </p:txBody>
+      </p:sp>
+    </p:spTree>
+    <p:extLst>
+      <p:ext uri="{BB962C8B-B14F-4D97-AF65-F5344CB8AC3E}">
+        <p14:creationId xmlns:p14="http://schemas.microsoft.com/office/powerpoint/2010/main" val="2332386400"/>
+      </p:ext>
+    </p:extLst>
+  </p:cSld>
+  <p:clrMapOvr>
+    <a:masterClrMapping/>
+  </p:clrMapOvr>
+</p:sld>
+</file>
+
+<file path=ppt/slides/slide9.xml><?xml version="1.0" encoding="utf-8"?>
+<p:sld xmlns:a="http://schemas.openxmlformats.org/drawingml/2006/main" xmlns:r="http://schemas.openxmlformats.org/officeDocument/2006/relationships" xmlns:p="http://schemas.openxmlformats.org/presentationml/2006/main">
+  <p:cSld>
+    <p:spTree>
+      <p:nvGrpSpPr>
+        <p:cNvPr id="1" name=""/>
+        <p:cNvGrpSpPr/>
+        <p:nvPr/>
+      </p:nvGrpSpPr>
+      <p:grpSpPr>
+        <a:xfrm>
+          <a:off x="0" y="0"/>
+          <a:ext cx="0" cy="0"/>
+          <a:chOff x="0" y="0"/>
+          <a:chExt cx="0" cy="0"/>
+        </a:xfrm>
+      </p:grpSpPr>
+      <p:pic>
+        <p:nvPicPr>
+          <p:cNvPr id="5" name="Picture 4">
+            <a:extLst>
+              <a:ext uri="{FF2B5EF4-FFF2-40B4-BE49-F238E27FC236}">
+                <a16:creationId xmlns:a16="http://schemas.microsoft.com/office/drawing/2014/main" id="{80C8391F-11AC-DA42-E973-6578AC98B11A}"/>
+              </a:ext>
+            </a:extLst>
+          </p:cNvPr>
+          <p:cNvPicPr>
+            <a:picLocks noChangeAspect="1"/>
+          </p:cNvPicPr>
+          <p:nvPr/>
+        </p:nvPicPr>
+        <p:blipFill>
+          <a:blip r:embed="rId2"/>
+          <a:stretch>
+            <a:fillRect/>
+          </a:stretch>
+        </p:blipFill>
+        <p:spPr>
+          <a:xfrm>
+            <a:off x="343815" y="2032334"/>
+            <a:ext cx="11214202" cy="3320569"/>
+          </a:xfrm>
+          <a:prstGeom prst="rect">
+            <a:avLst/>
+          </a:prstGeom>
+        </p:spPr>
+      </p:pic>
+      <p:sp>
+        <p:nvSpPr>
+          <p:cNvPr id="2" name="TextBox 1">
+            <a:extLst>
+              <a:ext uri="{FF2B5EF4-FFF2-40B4-BE49-F238E27FC236}">
+                <a16:creationId xmlns:a16="http://schemas.microsoft.com/office/drawing/2014/main" id="{089E3B3A-80C1-5C36-6E17-6EF89184A5D4}"/>
+              </a:ext>
+            </a:extLst>
+          </p:cNvPr>
+          <p:cNvSpPr txBox="1"/>
+          <p:nvPr/>
+        </p:nvSpPr>
+        <p:spPr>
+          <a:xfrm>
+            <a:off x="823331" y="242886"/>
+            <a:ext cx="10958170" cy="523220"/>
+          </a:xfrm>
+          <a:prstGeom prst="rect">
+            <a:avLst/>
+          </a:prstGeom>
+          <a:noFill/>
+        </p:spPr>
+        <p:txBody>
+          <a:bodyPr wrap="square" rtlCol="0">
+            <a:spAutoFit/>
+          </a:bodyPr>
+          <a:lstStyle/>
+          <a:p>
+            <a:r>
+              <a:rPr lang="en-GB" sz="2800" b="1" noProof="0" dirty="0">
+                <a:latin typeface="Calibri" panose="020F0502020204030204" pitchFamily="34" charset="0"/>
+                <a:ea typeface="Calibri" panose="020F0502020204030204" pitchFamily="34" charset="0"/>
+                <a:cs typeface="Calibri" panose="020F0502020204030204" pitchFamily="34" charset="0"/>
+              </a:rPr>
+              <a:t>Let’s start programming </a:t>
+            </a:r>
+          </a:p>
+        </p:txBody>
+      </p:sp>
     </p:spTree>
     <p:extLst>
       <p:ext uri="{BB962C8B-B14F-4D97-AF65-F5344CB8AC3E}">

--- a/slides.pptx
+++ b/slides.pptx
@@ -15,6 +15,7 @@
     <p:sldId id="260" r:id="rId9"/>
     <p:sldId id="261" r:id="rId10"/>
     <p:sldId id="262" r:id="rId11"/>
+    <p:sldId id="266" r:id="rId12"/>
   </p:sldIdLst>
   <p:sldSz cx="12192000" cy="6858000"/>
   <p:notesSz cx="6858000" cy="9144000"/>
@@ -3660,6 +3661,150 @@
     <p:extLst>
       <p:ext uri="{BB962C8B-B14F-4D97-AF65-F5344CB8AC3E}">
         <p14:creationId xmlns:p14="http://schemas.microsoft.com/office/powerpoint/2010/main" val="4237632311"/>
+      </p:ext>
+    </p:extLst>
+  </p:cSld>
+  <p:clrMapOvr>
+    <a:masterClrMapping/>
+  </p:clrMapOvr>
+</p:sld>
+</file>
+
+<file path=ppt/slides/slide11.xml><?xml version="1.0" encoding="utf-8"?>
+<p:sld xmlns:a="http://schemas.openxmlformats.org/drawingml/2006/main" xmlns:r="http://schemas.openxmlformats.org/officeDocument/2006/relationships" xmlns:p="http://schemas.openxmlformats.org/presentationml/2006/main">
+  <p:cSld>
+    <p:spTree>
+      <p:nvGrpSpPr>
+        <p:cNvPr id="1" name=""/>
+        <p:cNvGrpSpPr/>
+        <p:nvPr/>
+      </p:nvGrpSpPr>
+      <p:grpSpPr>
+        <a:xfrm>
+          <a:off x="0" y="0"/>
+          <a:ext cx="0" cy="0"/>
+          <a:chOff x="0" y="0"/>
+          <a:chExt cx="0" cy="0"/>
+        </a:xfrm>
+      </p:grpSpPr>
+      <p:pic>
+        <p:nvPicPr>
+          <p:cNvPr id="5" name="Picture 4">
+            <a:extLst>
+              <a:ext uri="{FF2B5EF4-FFF2-40B4-BE49-F238E27FC236}">
+                <a16:creationId xmlns:a16="http://schemas.microsoft.com/office/drawing/2014/main" id="{4C36FEDF-843F-9A20-031A-B87FC58A862D}"/>
+              </a:ext>
+            </a:extLst>
+          </p:cNvPr>
+          <p:cNvPicPr>
+            <a:picLocks noChangeAspect="1"/>
+          </p:cNvPicPr>
+          <p:nvPr/>
+        </p:nvPicPr>
+        <p:blipFill>
+          <a:blip r:embed="rId2"/>
+          <a:stretch>
+            <a:fillRect/>
+          </a:stretch>
+        </p:blipFill>
+        <p:spPr>
+          <a:xfrm>
+            <a:off x="723616" y="1305340"/>
+            <a:ext cx="10446800" cy="5178336"/>
+          </a:xfrm>
+          <a:prstGeom prst="rect">
+            <a:avLst/>
+          </a:prstGeom>
+        </p:spPr>
+      </p:pic>
+      <p:sp>
+        <p:nvSpPr>
+          <p:cNvPr id="7" name="TextBox 6">
+            <a:extLst>
+              <a:ext uri="{FF2B5EF4-FFF2-40B4-BE49-F238E27FC236}">
+                <a16:creationId xmlns:a16="http://schemas.microsoft.com/office/drawing/2014/main" id="{49AE7AD7-C636-3BFF-5F23-86AEBD899163}"/>
+              </a:ext>
+            </a:extLst>
+          </p:cNvPr>
+          <p:cNvSpPr txBox="1"/>
+          <p:nvPr/>
+        </p:nvSpPr>
+        <p:spPr>
+          <a:xfrm>
+            <a:off x="7502313" y="615605"/>
+            <a:ext cx="4583669" cy="461665"/>
+          </a:xfrm>
+          <a:prstGeom prst="rect">
+            <a:avLst/>
+          </a:prstGeom>
+          <a:noFill/>
+        </p:spPr>
+        <p:txBody>
+          <a:bodyPr wrap="square">
+            <a:spAutoFit/>
+          </a:bodyPr>
+          <a:lstStyle/>
+          <a:p>
+            <a:r>
+              <a:rPr lang="en-GB" sz="2400" b="1" dirty="0">
+                <a:solidFill>
+                  <a:srgbClr val="1E0EB2"/>
+                </a:solidFill>
+                <a:latin typeface="Consolas" panose="020B0609020204030204" pitchFamily="49" charset="0"/>
+              </a:rPr>
+              <a:t>https://geo-sciml.com/</a:t>
+            </a:r>
+          </a:p>
+        </p:txBody>
+      </p:sp>
+      <p:sp>
+        <p:nvSpPr>
+          <p:cNvPr id="10" name="TextBox 9">
+            <a:extLst>
+              <a:ext uri="{FF2B5EF4-FFF2-40B4-BE49-F238E27FC236}">
+                <a16:creationId xmlns:a16="http://schemas.microsoft.com/office/drawing/2014/main" id="{464714E8-1A4B-D5C5-9BB9-6574F2EB3024}"/>
+              </a:ext>
+            </a:extLst>
+          </p:cNvPr>
+          <p:cNvSpPr txBox="1"/>
+          <p:nvPr/>
+        </p:nvSpPr>
+        <p:spPr>
+          <a:xfrm>
+            <a:off x="670930" y="112714"/>
+            <a:ext cx="10958170" cy="523220"/>
+          </a:xfrm>
+          <a:prstGeom prst="rect">
+            <a:avLst/>
+          </a:prstGeom>
+          <a:noFill/>
+        </p:spPr>
+        <p:txBody>
+          <a:bodyPr wrap="square" rtlCol="0">
+            <a:spAutoFit/>
+          </a:bodyPr>
+          <a:lstStyle/>
+          <a:p>
+            <a:r>
+              <a:rPr lang="en-GB" sz="2800" b="1" dirty="0">
+                <a:latin typeface="Calibri" panose="020F0502020204030204" pitchFamily="34" charset="0"/>
+                <a:ea typeface="Calibri" panose="020F0502020204030204" pitchFamily="34" charset="0"/>
+                <a:cs typeface="Calibri" panose="020F0502020204030204" pitchFamily="34" charset="0"/>
+              </a:rPr>
+              <a:t>Continue learning after this session </a:t>
+            </a:r>
+            <a:endParaRPr lang="en-GB" sz="2800" b="1" noProof="0" dirty="0">
+              <a:latin typeface="Calibri" panose="020F0502020204030204" pitchFamily="34" charset="0"/>
+              <a:ea typeface="Calibri" panose="020F0502020204030204" pitchFamily="34" charset="0"/>
+              <a:cs typeface="Calibri" panose="020F0502020204030204" pitchFamily="34" charset="0"/>
+            </a:endParaRPr>
+          </a:p>
+        </p:txBody>
+      </p:sp>
+    </p:spTree>
+    <p:extLst>
+      <p:ext uri="{BB962C8B-B14F-4D97-AF65-F5344CB8AC3E}">
+        <p14:creationId xmlns:p14="http://schemas.microsoft.com/office/powerpoint/2010/main" val="685211915"/>
       </p:ext>
     </p:extLst>
   </p:cSld>
